--- a/assets/TCS302/Unit-2/Lecture17_18_Insertion_Deletion.pptx
+++ b/assets/TCS302/Unit-2/Lecture17_18_Insertion_Deletion.pptx
@@ -2782,90 +2782,6 @@
           </a:p>
         </p:txBody>
       </p:sp>
-      <p:sp>
-        <p:nvSpPr>
-          <p:cNvPr id="9" name="Shape 7"/>
-          <p:cNvSpPr/>
-          <p:nvPr/>
-        </p:nvSpPr>
-        <p:spPr>
-          <a:xfrm>
-            <a:off x="457200" y="4160520"/>
-            <a:ext cx="8229600" cy="502920"/>
-          </a:xfrm>
-          <a:prstGeom prst="roundRect">
-            <a:avLst>
-              <a:gd name="adj" fmla="val 12727"/>
-            </a:avLst>
-          </a:prstGeom>
-          <a:solidFill>
-            <a:srgbClr val="EEF3FB"/>
-          </a:solidFill>
-          <a:ln w="12700">
-            <a:solidFill>
-              <a:srgbClr val="1E2761"/>
-            </a:solidFill>
-            <a:prstDash val="solid"/>
-          </a:ln>
-        </p:spPr>
-        <p:txBody>
-          <a:bodyPr/>
-          <a:lstStyle/>
-          <a:p>
-            <a:endParaRPr lang="en-US"/>
-          </a:p>
-        </p:txBody>
-      </p:sp>
-      <p:sp>
-        <p:nvSpPr>
-          <p:cNvPr id="10" name="Text 8"/>
-          <p:cNvSpPr/>
-          <p:nvPr/>
-        </p:nvSpPr>
-        <p:spPr>
-          <a:xfrm>
-            <a:off x="640080" y="4160520"/>
-            <a:ext cx="7863840" cy="502920"/>
-          </a:xfrm>
-          <a:prstGeom prst="rect">
-            <a:avLst/>
-          </a:prstGeom>
-          <a:noFill/>
-          <a:ln/>
-        </p:spPr>
-        <p:txBody>
-          <a:bodyPr wrap="square" lIns="0" tIns="0" rIns="0" bIns="0" rtlCol="0" anchor="ctr"/>
-          <a:lstStyle/>
-          <a:p>
-            <a:pPr marL="0" indent="0">
-              <a:buNone/>
-            </a:pPr>
-            <a:r>
-              <a:rPr lang="en-US" sz="1200" b="1" dirty="0">
-                <a:solidFill>
-                  <a:srgbClr val="1E2761"/>
-                </a:solidFill>
-                <a:latin typeface="Calibri" pitchFamily="34" charset="0"/>
-                <a:ea typeface="Calibri" pitchFamily="34" charset="-122"/>
-                <a:cs typeface="Calibri" pitchFamily="34" charset="-120"/>
-              </a:rPr>
-              <a:t>ASK   </a:t>
-            </a:r>
-            <a:r>
-              <a:rPr lang="en-US" sz="1250" i="1" dirty="0">
-                <a:solidFill>
-                  <a:srgbClr val="2B2B2B"/>
-                </a:solidFill>
-                <a:latin typeface="Calibri" pitchFamily="34" charset="0"/>
-                <a:ea typeface="Calibri" pitchFamily="34" charset="-122"/>
-                <a:cs typeface="Calibri" pitchFamily="34" charset="-120"/>
-              </a:rPr>
-              <a:t>insertEnd walks while (p-&gt;next != NULL). Why might deleteEnd need to stop one step sooner?</a:t>
-            </a:r>
-            <a:endParaRPr lang="en-US" sz="1200" dirty="0"/>
-          </a:p>
-        </p:txBody>
-      </p:sp>
     </p:spTree>
   </p:cSld>
   <p:clrMapOvr>
@@ -3734,7 +3650,7 @@
         </p:nvSpPr>
         <p:spPr>
           <a:xfrm>
-            <a:off x="640080" y="1417320"/>
+            <a:off x="640080" y="1608512"/>
             <a:ext cx="822960" cy="457200"/>
           </a:xfrm>
           <a:prstGeom prst="rect">
@@ -3766,7 +3682,7 @@
         </p:nvSpPr>
         <p:spPr>
           <a:xfrm>
-            <a:off x="640080" y="1417320"/>
+            <a:off x="640080" y="1608512"/>
             <a:ext cx="822960" cy="457200"/>
           </a:xfrm>
           <a:prstGeom prst="rect">
@@ -3805,7 +3721,7 @@
         </p:nvSpPr>
         <p:spPr>
           <a:xfrm>
-            <a:off x="1691640" y="1417320"/>
+            <a:off x="1691640" y="1608512"/>
             <a:ext cx="822960" cy="457200"/>
           </a:xfrm>
           <a:prstGeom prst="rect">
@@ -3837,7 +3753,7 @@
         </p:nvSpPr>
         <p:spPr>
           <a:xfrm>
-            <a:off x="1691640" y="1417320"/>
+            <a:off x="1691640" y="1608512"/>
             <a:ext cx="822960" cy="457200"/>
           </a:xfrm>
           <a:prstGeom prst="rect">
@@ -3876,7 +3792,7 @@
         </p:nvSpPr>
         <p:spPr>
           <a:xfrm>
-            <a:off x="2743200" y="1417320"/>
+            <a:off x="2743200" y="1608512"/>
             <a:ext cx="822960" cy="457200"/>
           </a:xfrm>
           <a:prstGeom prst="rect">
@@ -3908,7 +3824,7 @@
         </p:nvSpPr>
         <p:spPr>
           <a:xfrm>
-            <a:off x="2743200" y="1417320"/>
+            <a:off x="2743200" y="1608512"/>
             <a:ext cx="822960" cy="457200"/>
           </a:xfrm>
           <a:prstGeom prst="rect">
@@ -3947,7 +3863,7 @@
         </p:nvSpPr>
         <p:spPr>
           <a:xfrm>
-            <a:off x="1463040" y="1417320"/>
+            <a:off x="1463040" y="1608512"/>
             <a:ext cx="320040" cy="457200"/>
           </a:xfrm>
           <a:prstGeom prst="rect">
@@ -3986,7 +3902,7 @@
         </p:nvSpPr>
         <p:spPr>
           <a:xfrm>
-            <a:off x="2514600" y="1417320"/>
+            <a:off x="2514600" y="1608512"/>
             <a:ext cx="320040" cy="457200"/>
           </a:xfrm>
           <a:prstGeom prst="rect">
@@ -4025,7 +3941,7 @@
         </p:nvSpPr>
         <p:spPr>
           <a:xfrm>
-            <a:off x="1463040" y="1965960"/>
+            <a:off x="1463040" y="2157152"/>
             <a:ext cx="1463040" cy="502920"/>
           </a:xfrm>
           <a:prstGeom prst="rect">
@@ -4081,7 +3997,7 @@
         </p:nvSpPr>
         <p:spPr>
           <a:xfrm>
-            <a:off x="2514600" y="960120"/>
+            <a:off x="2514600" y="1151312"/>
             <a:ext cx="1463040" cy="411480"/>
           </a:xfrm>
           <a:prstGeom prst="rect">
@@ -4137,7 +4053,7 @@
         </p:nvSpPr>
         <p:spPr>
           <a:xfrm>
-            <a:off x="4206240" y="1188720"/>
+            <a:off x="4738254" y="1188720"/>
             <a:ext cx="4023360" cy="2880360"/>
           </a:xfrm>
           <a:prstGeom prst="roundRect">
@@ -4171,7 +4087,7 @@
         </p:nvSpPr>
         <p:spPr>
           <a:xfrm>
-            <a:off x="4343400" y="1280160"/>
+            <a:off x="4875414" y="1280160"/>
             <a:ext cx="3749040" cy="2697480"/>
           </a:xfrm>
           <a:prstGeom prst="rect">
@@ -5549,8 +5465,8 @@
         </p:nvSpPr>
         <p:spPr>
           <a:xfrm>
-            <a:off x="457200" y="1188720"/>
-            <a:ext cx="4023360" cy="1920240"/>
+            <a:off x="457200" y="1604356"/>
+            <a:ext cx="4023360" cy="1120556"/>
           </a:xfrm>
           <a:prstGeom prst="roundRect">
             <a:avLst>
@@ -5634,8 +5550,8 @@
         </p:nvSpPr>
         <p:spPr>
           <a:xfrm>
-            <a:off x="4663440" y="1188720"/>
-            <a:ext cx="4023360" cy="1920240"/>
+            <a:off x="4663440" y="1572768"/>
+            <a:ext cx="4023360" cy="1152144"/>
           </a:xfrm>
           <a:prstGeom prst="roundRect">
             <a:avLst>
@@ -8672,45 +8588,6 @@
               <a:t>Starting from 5 -&gt; 10 -&gt; 15 -&gt; 20 -&gt; NULL, trace deleteAtPosition(head, 3) by hand. Which node is freed, and which two nodes end up next to each other?</a:t>
             </a:r>
             <a:endParaRPr lang="en-US" sz="1300" dirty="0"/>
-          </a:p>
-        </p:txBody>
-      </p:sp>
-      <p:sp>
-        <p:nvSpPr>
-          <p:cNvPr id="7" name="Text 5"/>
-          <p:cNvSpPr/>
-          <p:nvPr/>
-        </p:nvSpPr>
-        <p:spPr>
-          <a:xfrm>
-            <a:off x="640080" y="4828032"/>
-            <a:ext cx="7863840" cy="256032"/>
-          </a:xfrm>
-          <a:prstGeom prst="rect">
-            <a:avLst/>
-          </a:prstGeom>
-          <a:noFill/>
-          <a:ln/>
-        </p:spPr>
-        <p:txBody>
-          <a:bodyPr wrap="square" lIns="0" tIns="0" rIns="0" bIns="0" rtlCol="0" anchor="ctr"/>
-          <a:lstStyle/>
-          <a:p>
-            <a:pPr marL="0" indent="0">
-              <a:buNone/>
-            </a:pPr>
-            <a:r>
-              <a:rPr lang="en-US" sz="1000" i="1" dirty="0">
-                <a:solidFill>
-                  <a:srgbClr val="CADCFC"/>
-                </a:solidFill>
-                <a:latin typeface="Calibri" pitchFamily="34" charset="0"/>
-                <a:ea typeface="Calibri" pitchFamily="34" charset="-122"/>
-                <a:cs typeface="Calibri" pitchFamily="34" charset="-120"/>
-              </a:rPr>
-              <a:t>Next lecture: doubly linked lists and two-way header lists</a:t>
-            </a:r>
-            <a:endParaRPr lang="en-US" sz="1000" dirty="0"/>
           </a:p>
         </p:txBody>
       </p:sp>
